--- a/Novosibirsk_State_University/Английский язык/6 семестр/Homework/Double slit experiment.pptx
+++ b/Novosibirsk_State_University/Английский язык/6 семестр/Homework/Double slit experiment.pptx
@@ -108,6 +108,11 @@
       </a:defRPr>
     </a:lvl9pPr>
   </p:defaultTextStyle>
+  <p:extLst>
+    <p:ext uri="{EFAFB233-063F-42B5-8137-9DF3F51BA10A}">
+      <p15:sldGuideLst xmlns:p15="http://schemas.microsoft.com/office/powerpoint/2012/main"/>
+    </p:ext>
+  </p:extLst>
 </p:presentation>
 </file>
 
@@ -258,7 +263,7 @@
           <a:p>
             <a:fld id="{15658036-C50B-48EB-96A0-DE49F5F8650B}" type="datetimeFigureOut">
               <a:rPr lang="ru-RU" smtClean="0"/>
-              <a:t>18.05.2025</a:t>
+              <a:t>09.01.2026</a:t>
             </a:fld>
             <a:endParaRPr lang="ru-RU"/>
           </a:p>
@@ -456,7 +461,7 @@
           <a:p>
             <a:fld id="{15658036-C50B-48EB-96A0-DE49F5F8650B}" type="datetimeFigureOut">
               <a:rPr lang="ru-RU" smtClean="0"/>
-              <a:t>18.05.2025</a:t>
+              <a:t>09.01.2026</a:t>
             </a:fld>
             <a:endParaRPr lang="ru-RU"/>
           </a:p>
@@ -664,7 +669,7 @@
           <a:p>
             <a:fld id="{15658036-C50B-48EB-96A0-DE49F5F8650B}" type="datetimeFigureOut">
               <a:rPr lang="ru-RU" smtClean="0"/>
-              <a:t>18.05.2025</a:t>
+              <a:t>09.01.2026</a:t>
             </a:fld>
             <a:endParaRPr lang="ru-RU"/>
           </a:p>
@@ -862,7 +867,7 @@
           <a:p>
             <a:fld id="{15658036-C50B-48EB-96A0-DE49F5F8650B}" type="datetimeFigureOut">
               <a:rPr lang="ru-RU" smtClean="0"/>
-              <a:t>18.05.2025</a:t>
+              <a:t>09.01.2026</a:t>
             </a:fld>
             <a:endParaRPr lang="ru-RU"/>
           </a:p>
@@ -1137,7 +1142,7 @@
           <a:p>
             <a:fld id="{15658036-C50B-48EB-96A0-DE49F5F8650B}" type="datetimeFigureOut">
               <a:rPr lang="ru-RU" smtClean="0"/>
-              <a:t>18.05.2025</a:t>
+              <a:t>09.01.2026</a:t>
             </a:fld>
             <a:endParaRPr lang="ru-RU"/>
           </a:p>
@@ -1402,7 +1407,7 @@
           <a:p>
             <a:fld id="{15658036-C50B-48EB-96A0-DE49F5F8650B}" type="datetimeFigureOut">
               <a:rPr lang="ru-RU" smtClean="0"/>
-              <a:t>18.05.2025</a:t>
+              <a:t>09.01.2026</a:t>
             </a:fld>
             <a:endParaRPr lang="ru-RU"/>
           </a:p>
@@ -1814,7 +1819,7 @@
           <a:p>
             <a:fld id="{15658036-C50B-48EB-96A0-DE49F5F8650B}" type="datetimeFigureOut">
               <a:rPr lang="ru-RU" smtClean="0"/>
-              <a:t>18.05.2025</a:t>
+              <a:t>09.01.2026</a:t>
             </a:fld>
             <a:endParaRPr lang="ru-RU"/>
           </a:p>
@@ -1955,7 +1960,7 @@
           <a:p>
             <a:fld id="{15658036-C50B-48EB-96A0-DE49F5F8650B}" type="datetimeFigureOut">
               <a:rPr lang="ru-RU" smtClean="0"/>
-              <a:t>18.05.2025</a:t>
+              <a:t>09.01.2026</a:t>
             </a:fld>
             <a:endParaRPr lang="ru-RU"/>
           </a:p>
@@ -2068,7 +2073,7 @@
           <a:p>
             <a:fld id="{15658036-C50B-48EB-96A0-DE49F5F8650B}" type="datetimeFigureOut">
               <a:rPr lang="ru-RU" smtClean="0"/>
-              <a:t>18.05.2025</a:t>
+              <a:t>09.01.2026</a:t>
             </a:fld>
             <a:endParaRPr lang="ru-RU"/>
           </a:p>
@@ -2379,7 +2384,7 @@
           <a:p>
             <a:fld id="{15658036-C50B-48EB-96A0-DE49F5F8650B}" type="datetimeFigureOut">
               <a:rPr lang="ru-RU" smtClean="0"/>
-              <a:t>18.05.2025</a:t>
+              <a:t>09.01.2026</a:t>
             </a:fld>
             <a:endParaRPr lang="ru-RU"/>
           </a:p>
@@ -2667,7 +2672,7 @@
           <a:p>
             <a:fld id="{15658036-C50B-48EB-96A0-DE49F5F8650B}" type="datetimeFigureOut">
               <a:rPr lang="ru-RU" smtClean="0"/>
-              <a:t>18.05.2025</a:t>
+              <a:t>09.01.2026</a:t>
             </a:fld>
             <a:endParaRPr lang="ru-RU"/>
           </a:p>
@@ -2908,7 +2913,7 @@
           <a:p>
             <a:fld id="{15658036-C50B-48EB-96A0-DE49F5F8650B}" type="datetimeFigureOut">
               <a:rPr lang="ru-RU" smtClean="0"/>
-              <a:t>18.05.2025</a:t>
+              <a:t>09.01.2026</a:t>
             </a:fld>
             <a:endParaRPr lang="ru-RU"/>
           </a:p>
@@ -4111,10 +4116,16 @@
           <a:p>
             <a:pPr algn="ctr"/>
             <a:r>
-              <a:rPr lang="en-US" dirty="0"/>
+              <a:rPr lang="en-US" dirty="0">
+                <a:latin typeface="Times New Roman" panose="02020603050405020304" pitchFamily="18" charset="0"/>
+                <a:cs typeface="Times New Roman" panose="02020603050405020304" pitchFamily="18" charset="0"/>
+              </a:rPr>
               <a:t>Laser</a:t>
             </a:r>
-            <a:endParaRPr lang="ru-RU" dirty="0"/>
+            <a:endParaRPr lang="ru-RU" dirty="0">
+              <a:latin typeface="Times New Roman" panose="02020603050405020304" pitchFamily="18" charset="0"/>
+              <a:cs typeface="Times New Roman" panose="02020603050405020304" pitchFamily="18" charset="0"/>
+            </a:endParaRPr>
           </a:p>
         </p:txBody>
       </p:sp>
@@ -4148,10 +4159,16 @@
           <a:p>
             <a:pPr algn="ctr"/>
             <a:r>
-              <a:rPr lang="en-US" dirty="0"/>
+              <a:rPr lang="en-US" dirty="0">
+                <a:latin typeface="Times New Roman" panose="02020603050405020304" pitchFamily="18" charset="0"/>
+                <a:cs typeface="Times New Roman" panose="02020603050405020304" pitchFamily="18" charset="0"/>
+              </a:rPr>
               <a:t>Electron microscope</a:t>
             </a:r>
-            <a:endParaRPr lang="ru-RU" dirty="0"/>
+            <a:endParaRPr lang="ru-RU" dirty="0">
+              <a:latin typeface="Times New Roman" panose="02020603050405020304" pitchFamily="18" charset="0"/>
+              <a:cs typeface="Times New Roman" panose="02020603050405020304" pitchFamily="18" charset="0"/>
+            </a:endParaRPr>
           </a:p>
         </p:txBody>
       </p:sp>
@@ -4185,10 +4202,16 @@
           <a:p>
             <a:pPr algn="ctr"/>
             <a:r>
-              <a:rPr lang="en-US" dirty="0"/>
+              <a:rPr lang="en-US" dirty="0">
+                <a:latin typeface="Times New Roman" panose="02020603050405020304" pitchFamily="18" charset="0"/>
+                <a:cs typeface="Times New Roman" panose="02020603050405020304" pitchFamily="18" charset="0"/>
+              </a:rPr>
               <a:t>Quantum computer</a:t>
             </a:r>
-            <a:endParaRPr lang="ru-RU" dirty="0"/>
+            <a:endParaRPr lang="ru-RU" dirty="0">
+              <a:latin typeface="Times New Roman" panose="02020603050405020304" pitchFamily="18" charset="0"/>
+              <a:cs typeface="Times New Roman" panose="02020603050405020304" pitchFamily="18" charset="0"/>
+            </a:endParaRPr>
           </a:p>
         </p:txBody>
       </p:sp>
@@ -4397,6 +4420,11 @@
                     <a:lumMod val="95000"/>
                   </a:schemeClr>
                 </a:solidFill>
+                <a:highlight>
+                  <a:srgbClr val="000000"/>
+                </a:highlight>
+                <a:latin typeface="Times New Roman" panose="02020603050405020304" pitchFamily="18" charset="0"/>
+                <a:cs typeface="Times New Roman" panose="02020603050405020304" pitchFamily="18" charset="0"/>
               </a:rPr>
               <a:t>Thank you for your attention!</a:t>
             </a:r>
@@ -4406,6 +4434,11 @@
                   <a:lumMod val="95000"/>
                 </a:schemeClr>
               </a:solidFill>
+              <a:highlight>
+                <a:srgbClr val="000000"/>
+              </a:highlight>
+              <a:latin typeface="Times New Roman" panose="02020603050405020304" pitchFamily="18" charset="0"/>
+              <a:cs typeface="Times New Roman" panose="02020603050405020304" pitchFamily="18" charset="0"/>
             </a:endParaRPr>
           </a:p>
         </p:txBody>
